--- a/ゲーム科1年/00_前期/プログラミングⅠ/02_ソースファイルの追加.pptx
+++ b/ゲーム科1年/00_前期/プログラミングⅠ/02_ソースファイルの追加.pptx
@@ -267,7 +267,7 @@
           <a:p>
             <a:fld id="{E9CC885B-4903-4D54-9A93-00025F12DED9}" type="datetimeFigureOut">
               <a:rPr kumimoji="1" lang="ja-JP" altLang="en-US" smtClean="0"/>
-              <a:t>2024/8/27</a:t>
+              <a:t>2025/2/28</a:t>
             </a:fld>
             <a:endParaRPr kumimoji="1" lang="ja-JP" altLang="en-US"/>
           </a:p>
@@ -497,7 +497,7 @@
           <a:p>
             <a:fld id="{E9CC885B-4903-4D54-9A93-00025F12DED9}" type="datetimeFigureOut">
               <a:rPr kumimoji="1" lang="ja-JP" altLang="en-US" smtClean="0"/>
-              <a:t>2024/8/27</a:t>
+              <a:t>2025/2/28</a:t>
             </a:fld>
             <a:endParaRPr kumimoji="1" lang="ja-JP" altLang="en-US"/>
           </a:p>
@@ -737,7 +737,7 @@
           <a:p>
             <a:fld id="{E9CC885B-4903-4D54-9A93-00025F12DED9}" type="datetimeFigureOut">
               <a:rPr kumimoji="1" lang="ja-JP" altLang="en-US" smtClean="0"/>
-              <a:t>2024/8/27</a:t>
+              <a:t>2025/2/28</a:t>
             </a:fld>
             <a:endParaRPr kumimoji="1" lang="ja-JP" altLang="en-US"/>
           </a:p>
@@ -967,7 +967,7 @@
           <a:p>
             <a:fld id="{E9CC885B-4903-4D54-9A93-00025F12DED9}" type="datetimeFigureOut">
               <a:rPr kumimoji="1" lang="ja-JP" altLang="en-US" smtClean="0"/>
-              <a:t>2024/8/27</a:t>
+              <a:t>2025/2/28</a:t>
             </a:fld>
             <a:endParaRPr kumimoji="1" lang="ja-JP" altLang="en-US"/>
           </a:p>
@@ -1242,7 +1242,7 @@
           <a:p>
             <a:fld id="{E9CC885B-4903-4D54-9A93-00025F12DED9}" type="datetimeFigureOut">
               <a:rPr kumimoji="1" lang="ja-JP" altLang="en-US" smtClean="0"/>
-              <a:t>2024/8/27</a:t>
+              <a:t>2025/2/28</a:t>
             </a:fld>
             <a:endParaRPr kumimoji="1" lang="ja-JP" altLang="en-US"/>
           </a:p>
@@ -1571,7 +1571,7 @@
           <a:p>
             <a:fld id="{E9CC885B-4903-4D54-9A93-00025F12DED9}" type="datetimeFigureOut">
               <a:rPr kumimoji="1" lang="ja-JP" altLang="en-US" smtClean="0"/>
-              <a:t>2024/8/27</a:t>
+              <a:t>2025/2/28</a:t>
             </a:fld>
             <a:endParaRPr kumimoji="1" lang="ja-JP" altLang="en-US"/>
           </a:p>
@@ -2047,7 +2047,7 @@
           <a:p>
             <a:fld id="{E9CC885B-4903-4D54-9A93-00025F12DED9}" type="datetimeFigureOut">
               <a:rPr kumimoji="1" lang="ja-JP" altLang="en-US" smtClean="0"/>
-              <a:t>2024/8/27</a:t>
+              <a:t>2025/2/28</a:t>
             </a:fld>
             <a:endParaRPr kumimoji="1" lang="ja-JP" altLang="en-US"/>
           </a:p>
@@ -2188,7 +2188,7 @@
           <a:p>
             <a:fld id="{E9CC885B-4903-4D54-9A93-00025F12DED9}" type="datetimeFigureOut">
               <a:rPr kumimoji="1" lang="ja-JP" altLang="en-US" smtClean="0"/>
-              <a:t>2024/8/27</a:t>
+              <a:t>2025/2/28</a:t>
             </a:fld>
             <a:endParaRPr kumimoji="1" lang="ja-JP" altLang="en-US"/>
           </a:p>
@@ -2301,7 +2301,7 @@
           <a:p>
             <a:fld id="{E9CC885B-4903-4D54-9A93-00025F12DED9}" type="datetimeFigureOut">
               <a:rPr kumimoji="1" lang="ja-JP" altLang="en-US" smtClean="0"/>
-              <a:t>2024/8/27</a:t>
+              <a:t>2025/2/28</a:t>
             </a:fld>
             <a:endParaRPr kumimoji="1" lang="ja-JP" altLang="en-US"/>
           </a:p>
@@ -2644,7 +2644,7 @@
           <a:p>
             <a:fld id="{E9CC885B-4903-4D54-9A93-00025F12DED9}" type="datetimeFigureOut">
               <a:rPr kumimoji="1" lang="ja-JP" altLang="en-US" smtClean="0"/>
-              <a:t>2024/8/27</a:t>
+              <a:t>2025/2/28</a:t>
             </a:fld>
             <a:endParaRPr kumimoji="1" lang="ja-JP" altLang="en-US"/>
           </a:p>
@@ -2932,7 +2932,7 @@
           <a:p>
             <a:fld id="{E9CC885B-4903-4D54-9A93-00025F12DED9}" type="datetimeFigureOut">
               <a:rPr kumimoji="1" lang="ja-JP" altLang="en-US" smtClean="0"/>
-              <a:t>2024/8/27</a:t>
+              <a:t>2025/2/28</a:t>
             </a:fld>
             <a:endParaRPr kumimoji="1" lang="ja-JP" altLang="en-US"/>
           </a:p>
@@ -3205,7 +3205,7 @@
           <a:p>
             <a:fld id="{E9CC885B-4903-4D54-9A93-00025F12DED9}" type="datetimeFigureOut">
               <a:rPr kumimoji="1" lang="ja-JP" altLang="en-US" smtClean="0"/>
-              <a:t>2024/8/27</a:t>
+              <a:t>2025/2/28</a:t>
             </a:fld>
             <a:endParaRPr kumimoji="1" lang="ja-JP" altLang="en-US"/>
           </a:p>
@@ -3907,7 +3907,11 @@
               <a:t>「</a:t>
             </a:r>
             <a:r>
-              <a:rPr lang="en-US" altLang="ja-JP" sz="2400" dirty="0"/>
+              <a:rPr lang="en-US" altLang="ja-JP" sz="2400" b="1" dirty="0">
+                <a:solidFill>
+                  <a:srgbClr val="FF0000"/>
+                </a:solidFill>
+              </a:rPr>
               <a:t>Source</a:t>
             </a:r>
             <a:r>
@@ -5032,7 +5036,11 @@
               <a:t>フィルターには「</a:t>
             </a:r>
             <a:r>
-              <a:rPr kumimoji="1" lang="en-US" altLang="ja-JP" sz="2400" dirty="0"/>
+              <a:rPr kumimoji="1" lang="en-US" altLang="ja-JP" sz="2400" b="1" dirty="0">
+                <a:solidFill>
+                  <a:srgbClr val="FF0000"/>
+                </a:solidFill>
+              </a:rPr>
               <a:t>Source</a:t>
             </a:r>
             <a:r>
@@ -5394,7 +5402,11 @@
           </a:p>
           <a:p>
             <a:r>
-              <a:rPr lang="en-US" altLang="ja-JP" sz="2400" dirty="0"/>
+              <a:rPr lang="en-US" altLang="ja-JP" sz="2400" b="1" dirty="0">
+                <a:solidFill>
+                  <a:srgbClr val="FF0000"/>
+                </a:solidFill>
+              </a:rPr>
               <a:t>Main.cpp</a:t>
             </a:r>
             <a:r>
